--- a/Actividad5.3Banco de ejercicios_YoselinEscobedo_PW_8ISCM.pptx
+++ b/Actividad5.3Banco de ejercicios_YoselinEscobedo_PW_8ISCM.pptx
@@ -277,7 +277,7 @@
           <a:p>
             <a:fld id="{8755AACC-8CFD-4B4E-AC65-813CD604AE9E}" type="datetimeFigureOut">
               <a:rPr lang="es-MX" smtClean="0"/>
-              <a:t>12/06/2026</a:t>
+              <a:t>15/06/2026</a:t>
             </a:fld>
             <a:endParaRPr lang="es-MX"/>
           </a:p>
@@ -477,7 +477,7 @@
           <a:p>
             <a:fld id="{8755AACC-8CFD-4B4E-AC65-813CD604AE9E}" type="datetimeFigureOut">
               <a:rPr lang="es-MX" smtClean="0"/>
-              <a:t>12/06/2026</a:t>
+              <a:t>15/06/2026</a:t>
             </a:fld>
             <a:endParaRPr lang="es-MX"/>
           </a:p>
@@ -687,7 +687,7 @@
           <a:p>
             <a:fld id="{8755AACC-8CFD-4B4E-AC65-813CD604AE9E}" type="datetimeFigureOut">
               <a:rPr lang="es-MX" smtClean="0"/>
-              <a:t>12/06/2026</a:t>
+              <a:t>15/06/2026</a:t>
             </a:fld>
             <a:endParaRPr lang="es-MX"/>
           </a:p>
@@ -909,7 +909,7 @@
           <a:p>
             <a:fld id="{D77915CB-2684-4AD9-B52B-C929763090CA}" type="datetime1">
               <a:rPr lang="es-MX" smtClean="0"/>
-              <a:t>12/06/2026</a:t>
+              <a:t>15/06/2026</a:t>
             </a:fld>
             <a:endParaRPr lang="es-MX"/>
           </a:p>
@@ -1109,7 +1109,7 @@
           <a:p>
             <a:fld id="{CC66BEDB-3A64-4BD9-937C-92C35E747F6B}" type="datetime1">
               <a:rPr lang="es-MX" smtClean="0"/>
-              <a:t>12/06/2026</a:t>
+              <a:t>15/06/2026</a:t>
             </a:fld>
             <a:endParaRPr lang="es-MX"/>
           </a:p>
@@ -1385,7 +1385,7 @@
           <a:p>
             <a:fld id="{7867856E-A756-49D7-9127-08A5FEE39B11}" type="datetime1">
               <a:rPr lang="es-MX" smtClean="0"/>
-              <a:t>12/06/2026</a:t>
+              <a:t>15/06/2026</a:t>
             </a:fld>
             <a:endParaRPr lang="es-MX"/>
           </a:p>
@@ -1653,7 +1653,7 @@
           <a:p>
             <a:fld id="{0F0D400F-7146-497B-9B9A-15172F13A02D}" type="datetime1">
               <a:rPr lang="es-MX" smtClean="0"/>
-              <a:t>12/06/2026</a:t>
+              <a:t>15/06/2026</a:t>
             </a:fld>
             <a:endParaRPr lang="es-MX"/>
           </a:p>
@@ -2068,7 +2068,7 @@
           <a:p>
             <a:fld id="{FDBB07ED-6A46-4EC5-8D31-AF5325EB791E}" type="datetime1">
               <a:rPr lang="es-MX" smtClean="0"/>
-              <a:t>12/06/2026</a:t>
+              <a:t>15/06/2026</a:t>
             </a:fld>
             <a:endParaRPr lang="es-MX"/>
           </a:p>
@@ -2210,7 +2210,7 @@
           <a:p>
             <a:fld id="{E8E6EC20-398A-4F8E-8907-91BEED6CE050}" type="datetime1">
               <a:rPr lang="es-MX" smtClean="0"/>
-              <a:t>12/06/2026</a:t>
+              <a:t>15/06/2026</a:t>
             </a:fld>
             <a:endParaRPr lang="es-MX"/>
           </a:p>
@@ -2323,7 +2323,7 @@
           <a:p>
             <a:fld id="{96403480-F7FA-4694-86FE-8DD7AB8AAB4D}" type="datetime1">
               <a:rPr lang="es-MX" smtClean="0"/>
-              <a:t>12/06/2026</a:t>
+              <a:t>15/06/2026</a:t>
             </a:fld>
             <a:endParaRPr lang="es-MX"/>
           </a:p>
@@ -2636,7 +2636,7 @@
           <a:p>
             <a:fld id="{248DDF87-7080-4D04-88C8-317B64B148B7}" type="datetime1">
               <a:rPr lang="es-MX" smtClean="0"/>
-              <a:t>12/06/2026</a:t>
+              <a:t>15/06/2026</a:t>
             </a:fld>
             <a:endParaRPr lang="es-MX"/>
           </a:p>
@@ -2836,7 +2836,7 @@
           <a:p>
             <a:fld id="{8755AACC-8CFD-4B4E-AC65-813CD604AE9E}" type="datetimeFigureOut">
               <a:rPr lang="es-MX" smtClean="0"/>
-              <a:t>12/06/2026</a:t>
+              <a:t>15/06/2026</a:t>
             </a:fld>
             <a:endParaRPr lang="es-MX"/>
           </a:p>
@@ -3125,7 +3125,7 @@
           <a:p>
             <a:fld id="{7F486D58-5117-4B8F-8500-5045B431E6C2}" type="datetime1">
               <a:rPr lang="es-MX" smtClean="0"/>
-              <a:t>12/06/2026</a:t>
+              <a:t>15/06/2026</a:t>
             </a:fld>
             <a:endParaRPr lang="es-MX"/>
           </a:p>
@@ -3325,7 +3325,7 @@
           <a:p>
             <a:fld id="{DB46EEC1-3A40-4E7C-B91C-34BA995EDB68}" type="datetime1">
               <a:rPr lang="es-MX" smtClean="0"/>
-              <a:t>12/06/2026</a:t>
+              <a:t>15/06/2026</a:t>
             </a:fld>
             <a:endParaRPr lang="es-MX"/>
           </a:p>
@@ -3535,7 +3535,7 @@
           <a:p>
             <a:fld id="{9D9868A7-8A19-46D4-88B4-1A35902D5A54}" type="datetime1">
               <a:rPr lang="es-MX" smtClean="0"/>
-              <a:t>12/06/2026</a:t>
+              <a:t>15/06/2026</a:t>
             </a:fld>
             <a:endParaRPr lang="es-MX"/>
           </a:p>
@@ -3811,7 +3811,7 @@
           <a:p>
             <a:fld id="{8755AACC-8CFD-4B4E-AC65-813CD604AE9E}" type="datetimeFigureOut">
               <a:rPr lang="es-MX" smtClean="0"/>
-              <a:t>12/06/2026</a:t>
+              <a:t>15/06/2026</a:t>
             </a:fld>
             <a:endParaRPr lang="es-MX"/>
           </a:p>
@@ -4079,7 +4079,7 @@
           <a:p>
             <a:fld id="{8755AACC-8CFD-4B4E-AC65-813CD604AE9E}" type="datetimeFigureOut">
               <a:rPr lang="es-MX" smtClean="0"/>
-              <a:t>12/06/2026</a:t>
+              <a:t>15/06/2026</a:t>
             </a:fld>
             <a:endParaRPr lang="es-MX"/>
           </a:p>
@@ -4494,7 +4494,7 @@
           <a:p>
             <a:fld id="{8755AACC-8CFD-4B4E-AC65-813CD604AE9E}" type="datetimeFigureOut">
               <a:rPr lang="es-MX" smtClean="0"/>
-              <a:t>12/06/2026</a:t>
+              <a:t>15/06/2026</a:t>
             </a:fld>
             <a:endParaRPr lang="es-MX"/>
           </a:p>
@@ -4636,7 +4636,7 @@
           <a:p>
             <a:fld id="{8755AACC-8CFD-4B4E-AC65-813CD604AE9E}" type="datetimeFigureOut">
               <a:rPr lang="es-MX" smtClean="0"/>
-              <a:t>12/06/2026</a:t>
+              <a:t>15/06/2026</a:t>
             </a:fld>
             <a:endParaRPr lang="es-MX"/>
           </a:p>
@@ -4749,7 +4749,7 @@
           <a:p>
             <a:fld id="{8755AACC-8CFD-4B4E-AC65-813CD604AE9E}" type="datetimeFigureOut">
               <a:rPr lang="es-MX" smtClean="0"/>
-              <a:t>12/06/2026</a:t>
+              <a:t>15/06/2026</a:t>
             </a:fld>
             <a:endParaRPr lang="es-MX"/>
           </a:p>
@@ -5062,7 +5062,7 @@
           <a:p>
             <a:fld id="{8755AACC-8CFD-4B4E-AC65-813CD604AE9E}" type="datetimeFigureOut">
               <a:rPr lang="es-MX" smtClean="0"/>
-              <a:t>12/06/2026</a:t>
+              <a:t>15/06/2026</a:t>
             </a:fld>
             <a:endParaRPr lang="es-MX"/>
           </a:p>
@@ -5351,7 +5351,7 @@
           <a:p>
             <a:fld id="{8755AACC-8CFD-4B4E-AC65-813CD604AE9E}" type="datetimeFigureOut">
               <a:rPr lang="es-MX" smtClean="0"/>
-              <a:t>12/06/2026</a:t>
+              <a:t>15/06/2026</a:t>
             </a:fld>
             <a:endParaRPr lang="es-MX"/>
           </a:p>
@@ -5594,7 +5594,7 @@
           <a:p>
             <a:fld id="{8755AACC-8CFD-4B4E-AC65-813CD604AE9E}" type="datetimeFigureOut">
               <a:rPr lang="es-MX" smtClean="0"/>
-              <a:t>12/06/2026</a:t>
+              <a:t>15/06/2026</a:t>
             </a:fld>
             <a:endParaRPr lang="es-MX"/>
           </a:p>
@@ -6164,7 +6164,7 @@
           <a:p>
             <a:fld id="{24A7DDD1-9F77-4F12-BA00-45107A5EA290}" type="datetime1">
               <a:rPr lang="es-MX" smtClean="0"/>
-              <a:t>12/06/2026</a:t>
+              <a:t>15/06/2026</a:t>
             </a:fld>
             <a:endParaRPr lang="es-MX"/>
           </a:p>
@@ -9116,7 +9116,7 @@
         <p:spPr>
           <a:xfrm>
             <a:off x="1690407" y="849742"/>
-            <a:ext cx="8811185" cy="2534027"/>
+            <a:ext cx="8811185" cy="2118529"/>
           </a:xfrm>
           <a:prstGeom prst="rect">
             <a:avLst/>
@@ -9221,10 +9221,10 @@
                 <a:ea typeface="Aptos" panose="020B0004020202020204" pitchFamily="34" charset="0"/>
                 <a:cs typeface="Arial" panose="020B0604020202020204" pitchFamily="34" charset="0"/>
               </a:rPr>
-              <a:t>Anexo carpeta que contiene el código fuente correspondiente a este avance “</a:t>
-            </a:r>
-            <a:r>
-              <a:rPr lang="es-ES" dirty="0" err="1">
+              <a:t>Anexo enlace </a:t>
+            </a:r>
+            <a:r>
+              <a:rPr lang="es-ES">
                 <a:solidFill>
                   <a:prstClr val="black"/>
                 </a:solidFill>
@@ -9232,18 +9232,7 @@
                 <a:ea typeface="Aptos" panose="020B0004020202020204" pitchFamily="34" charset="0"/>
                 <a:cs typeface="Arial" panose="020B0604020202020204" pitchFamily="34" charset="0"/>
               </a:rPr>
-              <a:t>Proyecto_angular</a:t>
-            </a:r>
-            <a:r>
-              <a:rPr lang="es-ES" dirty="0">
-                <a:solidFill>
-                  <a:prstClr val="black"/>
-                </a:solidFill>
-                <a:latin typeface="Arial" panose="020B0604020202020204" pitchFamily="34" charset="0"/>
-                <a:ea typeface="Aptos" panose="020B0004020202020204" pitchFamily="34" charset="0"/>
-                <a:cs typeface="Arial" panose="020B0604020202020204" pitchFamily="34" charset="0"/>
-              </a:rPr>
-              <a:t>”</a:t>
+              <a:t>a Git: https://github.com/yoselinescobedolopez/PW-Tema-5.git</a:t>
             </a:r>
             <a:endParaRPr kumimoji="0" lang="es-ES" sz="1800" b="0" i="0" u="none" strike="noStrike" kern="1200" cap="none" spc="0" normalizeH="0" baseline="0" noProof="0" dirty="0">
               <a:ln>
